--- a/DBTUNING/ch09_JOIN실행원리/ch09_교안.pptx
+++ b/DBTUNING/ch09_JOIN실행원리/ch09_교안.pptx
@@ -545,7 +545,7 @@
           <a:lstStyle/>
           <a:p>
             <a:r>
-              <a:t>제7장은 여러 테이블을 함께 다루는 첫 챕터다. 지금까지는 한 테이블을 어떻게 읽을지만 봤지만 실무 SQL은 대부분 조인이고, 성능 사고도 대부분 조인에서 난다. 이번 장의 실행계획과 Buffers는 모두 진료비청구심사 실습 DB에서 직접 캡처한 실측값이며, 강사는 값을 외우게 하기보다 어느 컬럼을 근거로 무엇을 판단했는지를 따라오게 해야 한다. 특히 힌트를 걸었는데 의도대로 적용되지 않은 사례가 이 장의 백미이므로, 시작할 때 그 반전을 미리 예고해 두면 집중도가 크게 올라간다.</a:t>
+              <a:t>제ch09은 여러 테이블을 함께 다루는 첫 챕터다. 지금까지는 한 테이블을 어떻게 읽을지만 봤지만 실무 SQL은 대부분 조인이고, 성능 사고도 대부분 조인에서 난다. 이번 장의 실행계획과 Buffers는 모두 진료비청구심사 실습 DB에서 직접 캡처한 실측값이며, 강사는 값을 외우게 하기보다 어느 컬럼을 근거로 무엇을 판단했는지를 따라오게 해야 한다. 특히 힌트를 걸었는데 의도대로 적용되지 않은 사례가 이 장의 백미이므로, 시작할 때 그 반전을 미리 예고해 두면 집중도가 크게 올라간다.</a:t>
             </a:r>
           </a:p>
         </p:txBody>
@@ -6642,7 +6642,7 @@
                 </a:solidFill>
                 <a:latin typeface="Malgun Gothic"/>
               </a:rPr>
-              <a:t>Oracle SQL 튜닝 과정  ·  제7장</a:t>
+              <a:t>Oracle SQL 튜닝 과정  ·  제ch09</a:t>
             </a:r>
           </a:p>
         </p:txBody>
@@ -15996,7 +15996,7 @@
                 </a:solidFill>
                 <a:latin typeface="Malgun Gothic"/>
               </a:rPr>
-              <a:t>•  실습문제 10문항 — SQL튜닝_Ch07_문제.md</a:t>
+              <a:t>•  실습문제 10문항 — ch09_문제.md</a:t>
             </a:r>
           </a:p>
           <a:p>

--- a/DBTUNING/ch09_JOIN실행원리/ch09_교안.pptx
+++ b/DBTUNING/ch09_JOIN실행원리/ch09_교안.pptx
@@ -545,7 +545,7 @@
           <a:lstStyle/>
           <a:p>
             <a:r>
-              <a:t>제ch09은 여러 테이블을 함께 다루는 첫 챕터다. 지금까지는 한 테이블을 어떻게 읽을지만 봤지만 실무 SQL은 대부분 조인이고, 성능 사고도 대부분 조인에서 난다. 이번 장의 실행계획과 Buffers는 모두 진료비청구심사 실습 DB에서 직접 캡처한 실측값이며, 강사는 값을 외우게 하기보다 어느 컬럼을 근거로 무엇을 판단했는지를 따라오게 해야 한다. 특히 힌트를 걸었는데 의도대로 적용되지 않은 사례가 이 장의 백미이므로, 시작할 때 그 반전을 미리 예고해 두면 집중도가 크게 올라간다.</a:t>
+              <a:t>ch09은 여러 테이블을 함께 다루는 첫 챕터다. 지금까지는 한 테이블을 어떻게 읽을지만 봤지만 실무 SQL은 대부분 조인이고, 성능 사고도 대부분 조인에서 난다. 이번 장의 실행계획과 Buffers는 모두 진료비청구심사 실습 DB에서 직접 캡처한 실측값이며, 강사는 값을 외우게 하기보다 어느 컬럼을 근거로 무엇을 판단했는지를 따라오게 해야 한다. 특히 힌트를 걸었는데 의도대로 적용되지 않은 사례가 이 장의 백미이므로, 시작할 때 그 반전을 미리 예고해 두면 집중도가 크게 올라간다.</a:t>
             </a:r>
           </a:p>
         </p:txBody>
@@ -6642,7 +6642,7 @@
                 </a:solidFill>
                 <a:latin typeface="Malgun Gothic"/>
               </a:rPr>
-              <a:t>Oracle SQL 튜닝 과정  ·  제ch09</a:t>
+              <a:t>Oracle SQL 튜닝 과정  ·  ch09</a:t>
             </a:r>
           </a:p>
         </p:txBody>
